--- a/docs/presentation-2026-08-31/deck.pptx
+++ b/docs/presentation-2026-08-31/deck.pptx
@@ -11163,7 +11163,7 @@
             </a:pPr>
             <a:r>
               <a:rPr sz="1500"/>
-              <a:t>A GPU only speeds the written explanation up: 5.2 s versus 24.2 s per incident.</a:t>
+              <a:t>A GPU only speeds the written explanation up: 3.9 s versus 18.2 s per incident.</a:t>
             </a:r>
           </a:p>
         </p:txBody>
@@ -15903,7 +15903,7 @@
             </a:pPr>
             <a:r>
               <a:rPr sz="1300"/>
-              <a:t>Optional NVIDIA GPU only speeds the written explanation up (5.2 s vs 24.2 s).</a:t>
+              <a:t>Optional NVIDIA GPU only speeds the written explanation up (3.9 s vs 18.2 s).</a:t>
             </a:r>
           </a:p>
           <a:p>
